--- a/DBTUNING/Day01_SQL튜닝입문과측정도구/SQL튜닝_Ch01_교안.pptx
+++ b/DBTUNING/Day01_SQL튜닝입문과측정도구/SQL튜닝_Ch01_교안.pptx
@@ -10032,7 +10032,7 @@
                 </a:solidFill>
                 <a:latin typeface="Malgun Gothic"/>
               </a:rPr>
-              <a:t>SQL_ID  cmm0gaqr7whs5</a:t>
+              <a:t>SQL_ID  7z0a37r0usf76  —  CLAIM_DETAILS 가 캐시에 없어 Reads 열이 나타난다</a:t>
             </a:r>
           </a:p>
         </p:txBody>
@@ -10110,7 +10110,7 @@
                 </a:solidFill>
                 <a:latin typeface="Consolas"/>
               </a:rPr>
-              <a:t>| Id | Operation             | Name               | E-Rows | A-Rows |   A-Time   | Buffers |</a:t>
+              <a:t>| Id | Operation             | Name               | E-Rows | A-Rows |   A-Time   | Buffers | Reads |</a:t>
             </a:r>
           </a:p>
           <a:p>
@@ -10121,7 +10121,7 @@
                 </a:solidFill>
                 <a:latin typeface="Consolas"/>
               </a:rPr>
-              <a:t>| 0  | SELECT STATEMENT      |                    |        |      1 |00:00:03.04 |    8604 |</a:t>
+              <a:t>| 0  | SELECT STATEMENT      |                    |        |      1 |00:00:00.10 |    8659 |  6709 |</a:t>
             </a:r>
           </a:p>
           <a:p>
@@ -10132,7 +10132,7 @@
                 </a:solidFill>
                 <a:latin typeface="Consolas"/>
               </a:rPr>
-              <a:t>| 1  |  SORT AGGREGATE       |                    |      1 |      1 |00:00:03.04 |    8604 |</a:t>
+              <a:t>| 1  |  SORT AGGREGATE       |                    |      1 |      1 |00:00:00.10 |    8659 |  6709 |</a:t>
             </a:r>
           </a:p>
           <a:p>
@@ -10143,7 +10143,7 @@
                 </a:solidFill>
                 <a:latin typeface="Consolas"/>
               </a:rPr>
-              <a:t>| 2  |   HASH JOIN RIGHT SEMI|                    |   296K |  79342 |00:00:03.03 |    8604 |</a:t>
+              <a:t>| 2  |   HASH JOIN RIGHT SEMI|                    |   296K |  79342 |00:00:00.10 |    8659 |  6709 |</a:t>
             </a:r>
           </a:p>
           <a:p>
@@ -10154,7 +10154,7 @@
                 </a:solidFill>
                 <a:latin typeface="Consolas"/>
               </a:rPr>
-              <a:t>| 3  |    VIEW                | VW_NSO_1          |   299K |  90430 |00:00:00.03 |    6713 |</a:t>
+              <a:t>| 3  |    VIEW                | VW_NSO_1          |   299K |  90430 |00:00:00.02 |    6768 |  6709 |</a:t>
             </a:r>
           </a:p>
           <a:p>
@@ -10165,7 +10165,7 @@
                 </a:solidFill>
                 <a:latin typeface="Consolas"/>
               </a:rPr>
-              <a:t>| 4  |     HASH JOIN          |                    |   299K |  90430 |00:00:00.02 |    6713 |</a:t>
+              <a:t>| 4  |     HASH JOIN          |                    |   299K |  90430 |00:00:00.02 |    6768 |  6709 |</a:t>
             </a:r>
           </a:p>
           <a:p>
@@ -10176,7 +10176,7 @@
                 </a:solidFill>
                 <a:latin typeface="Consolas"/>
               </a:rPr>
-              <a:t>| 5  |      TABLE ACCESS FULL | DRUG_MASTER        |   3333 |   1000 |00:00:00.01 |      91 |</a:t>
+              <a:t>| 5  |      TABLE ACCESS FULL | DRUG_MASTER        |   3333 |   1000 |00:00:00.01 |      91 |    89 |</a:t>
             </a:r>
           </a:p>
           <a:p>
@@ -10187,7 +10187,7 @@
                 </a:solidFill>
                 <a:latin typeface="Consolas"/>
               </a:rPr>
-              <a:t>| 6  |      TABLE ACCESS FULL | CLAIM_DETAILS      |   899K |   899K |00:00:00.01 |    6621 |</a:t>
+              <a:t>| 6  |      TABLE ACCESS FULL | CLAIM_DETAILS      |   899K |   899K |00:00:00.01 |    6621 |  6613 |</a:t>
             </a:r>
           </a:p>
           <a:p>
@@ -10198,7 +10198,7 @@
                 </a:solidFill>
                 <a:latin typeface="Consolas"/>
               </a:rPr>
-              <a:t>| 7  |    INDEX FAST FULL SCAN| PK_MEDICAL_CLAIMS  |   300K |   300K |00:00:02.88 |    1891 |</a:t>
+              <a:t>| 7  |    INDEX FAST FULL SCAN| PK_MEDICAL_CLAIMS  |   300K |   300K |00:00:00.02 |    1891 |     0 |</a:t>
             </a:r>
           </a:p>
         </p:txBody>
@@ -10551,7 +10551,7 @@
                 </a:solidFill>
                 <a:latin typeface="Malgun Gothic"/>
               </a:rPr>
-              <a:t>SQL_ID  b0r8p72bjvc2f  —  구조는 A와 동일, VIEW 이름만 VW_SQ_1</a:t>
+              <a:t>SQL_ID  7jgu8vt9cppsb  —  구조는 A와 동일, VIEW 이름만 VW_SQ_1. Reads 열이 없다</a:t>
             </a:r>
           </a:p>
         </p:txBody>
@@ -10640,7 +10640,7 @@
                 </a:solidFill>
                 <a:latin typeface="Consolas"/>
               </a:rPr>
-              <a:t>| 0  | SELECT STATEMENT      |                    |        |      1 |00:00:00.13 |    8604 |</a:t>
+              <a:t>| 0  | SELECT STATEMENT      |                    |        |      1 |00:00:00.05 |    8604 |</a:t>
             </a:r>
           </a:p>
           <a:p>
@@ -10651,7 +10651,7 @@
                 </a:solidFill>
                 <a:latin typeface="Consolas"/>
               </a:rPr>
-              <a:t>| 1  |  SORT AGGREGATE       |                    |      1 |      1 |00:00:00.13 |    8604 |</a:t>
+              <a:t>| 1  |  SORT AGGREGATE       |                    |      1 |      1 |00:00:00.05 |    8604 |</a:t>
             </a:r>
           </a:p>
           <a:p>
@@ -10662,7 +10662,7 @@
                 </a:solidFill>
                 <a:latin typeface="Consolas"/>
               </a:rPr>
-              <a:t>| 2  |   HASH JOIN RIGHT SEMI|                    |   296K |  79342 |00:00:00.12 |    8604 |</a:t>
+              <a:t>| 2  |   HASH JOIN RIGHT SEMI|                    |   296K |  79342 |00:00:00.06 |    8604 |</a:t>
             </a:r>
           </a:p>
           <a:p>
@@ -10673,7 +10673,7 @@
                 </a:solidFill>
                 <a:latin typeface="Consolas"/>
               </a:rPr>
-              <a:t>| 3  |    VIEW                | VW_SQ_1           |   299K |  90430 |00:00:00.04 |    6713 |</a:t>
+              <a:t>| 3  |    VIEW                | VW_SQ_1           |   299K |  90430 |00:00:00.02 |    6713 |</a:t>
             </a:r>
           </a:p>
           <a:p>
@@ -10684,7 +10684,7 @@
                 </a:solidFill>
                 <a:latin typeface="Consolas"/>
               </a:rPr>
-              <a:t>| 4  |     HASH JOIN          |                    |   299K |  90430 |00:00:00.03 |    6713 |</a:t>
+              <a:t>| 4  |     HASH JOIN          |                    |   299K |  90430 |00:00:00.02 |    6713 |</a:t>
             </a:r>
           </a:p>
           <a:p>
@@ -10706,7 +10706,7 @@
                 </a:solidFill>
                 <a:latin typeface="Consolas"/>
               </a:rPr>
-              <a:t>| 6  |      TABLE ACCESS FULL | CLAIM_DETAILS      |   899K |   899K |00:00:00.02 |    6621 |</a:t>
+              <a:t>| 6  |      TABLE ACCESS FULL | CLAIM_DETAILS      |   899K |   899K |00:00:00.01 |    6621 |</a:t>
             </a:r>
           </a:p>
           <a:p>
@@ -10717,7 +10717,7 @@
                 </a:solidFill>
                 <a:latin typeface="Consolas"/>
               </a:rPr>
-              <a:t>| 7  |    INDEX FAST FULL SCAN| PK_MEDICAL_CLAIMS  |   300K |   300K |00:00:00.02 |    1891 |</a:t>
+              <a:t>| 7  |    INDEX FAST FULL SCAN| PK_MEDICAL_CLAIMS  |   300K |   300K |00:00:00.01 |    1891 |</a:t>
             </a:r>
           </a:p>
         </p:txBody>
@@ -10921,7 +10921,7 @@
                 </a:solidFill>
                 <a:latin typeface="Malgun Gothic"/>
               </a:rPr>
-              <a:t>•  그런데 A-Time은 다르다 — 3.04초 vs 0.13초, Buffers는 둘 다 8,604</a:t>
+              <a:t>•  그런데 A-Time은 다르다 — 0.10초 vs 0.05초, Buffers는 둘 다 8,604(A 는 물리 읽기 몫 55 가 더해져 8,659)</a:t>
             </a:r>
           </a:p>
           <a:p>
@@ -11070,7 +11070,7 @@
                 </a:solidFill>
                 <a:latin typeface="Malgun Gothic"/>
               </a:rPr>
-              <a:t>SQL_ID  a3nqx088zkzhq  —  MEDICAL_CLAIMS 접근이 보이지 않는다</a:t>
+              <a:t>SQL_ID  dx438vv8qg166  —  MEDICAL_CLAIMS 접근이 보이지 않는다</a:t>
             </a:r>
           </a:p>
         </p:txBody>
@@ -12053,7 +12053,7 @@
                 </a:solidFill>
                 <a:latin typeface="Malgun Gothic"/>
               </a:rPr>
-              <a:t>    –  A는 3.04초, B는 0.13초</a:t>
+              <a:t>    –  A는 0.10초, B는 0.05초 — A 의 계획에만 Reads 열(6,709)이 있다</a:t>
             </a:r>
           </a:p>
           <a:p>
@@ -12075,7 +12075,7 @@
                 </a:solidFill>
                 <a:latin typeface="Malgun Gothic"/>
               </a:rPr>
-              <a:t>    –  A의 7번 INDEX FAST FULL SCAN은 2.88초, B의 같은 단계는 0.02초</a:t>
+              <a:t>    –  A의 6번 CLAIM_DETAILS Full Scan 에 Reads 6,613 이 몰려 있다, B의 같은 단계는 Reads 없음</a:t>
             </a:r>
           </a:p>
         </p:txBody>
@@ -12290,7 +12290,7 @@
                 </a:solidFill>
                 <a:latin typeface="Malgun Gothic"/>
               </a:rPr>
-              <a:t>    –  2.88초가 걸린 A의 7번 단계는 '처음 읽는 블록'에 해당하는 부분과 일치한다</a:t>
+              <a:t>    –  Reads 가 몰린 A의 6번 단계는 '처음 읽는 블록'(실습 01 이 읽지 않은 CLAIM_DETAILS)과 일치한다</a:t>
             </a:r>
           </a:p>
         </p:txBody>
@@ -12948,7 +12948,7 @@
                 </a:solidFill>
                 <a:latin typeface="Consolas"/>
               </a:rPr>
-              <a:t>| A. IN             |   8,604 | 3.04초 | 6,694K                 |</a:t>
+              <a:t>| A. IN             |   8,659 | 0.10초 | 6,651K                 |</a:t>
             </a:r>
           </a:p>
           <a:p>
@@ -12959,7 +12959,7 @@
                 </a:solidFill>
                 <a:latin typeface="Consolas"/>
               </a:rPr>
-              <a:t>| B. EXISTS         |   8,604 | 0.13초 | 6,694K                 |</a:t>
+              <a:t>| B. EXISTS         |   8,604 | 0.05초 | 6,694K                 |</a:t>
             </a:r>
           </a:p>
           <a:p>
